--- a/Modul Minna 1/Bab 21/46. Minna 1 Tata Bahasa Bab 21 - Slide.pptx
+++ b/Modul Minna 1/Bab 21/46. Minna 1 Tata Bahasa Bab 21 - Slide.pptx
@@ -2964,7 +2964,7 @@
                 <a:ea typeface="Arial" pitchFamily="34" charset="-122"/>
                 <a:cs typeface="Arial" pitchFamily="34" charset="-120"/>
               </a:rPr>
-              <a:t>Sdr. Budi bilang besok libur.</a:t>
+              <a:t>Budi bilang besok libur.</a:t>
             </a:r>
             <a:endParaRPr lang="en-US" sz="950" dirty="0"/>
           </a:p>
@@ -4077,7 +4077,7 @@
                 <a:ea typeface="Arial" pitchFamily="34" charset="-122"/>
                 <a:cs typeface="Arial" pitchFamily="34" charset="-120"/>
               </a:rPr>
-              <a:t>とうきょうでサッカーのしあいがあります。</a:t>
+              <a:t>ジャカルタでサッカーのしあいがあります。</a:t>
             </a:r>
             <a:endParaRPr lang="en-US" sz="1700" dirty="0"/>
           </a:p>
@@ -4116,7 +4116,7 @@
                 <a:ea typeface="Arial" pitchFamily="34" charset="-122"/>
                 <a:cs typeface="Arial" pitchFamily="34" charset="-120"/>
               </a:rPr>
-              <a:t>Toukyou de sakkaa no shiai ga arimasu</a:t>
+              <a:t>Jakaruta de sakkaa no shiai ga arimasu</a:t>
             </a:r>
             <a:pPr indent="0" marL="0">
               <a:buNone/>
@@ -4144,7 +4144,7 @@
                 <a:ea typeface="Arial" pitchFamily="34" charset="-122"/>
                 <a:cs typeface="Arial" pitchFamily="34" charset="-120"/>
               </a:rPr>
-              <a:t>Di Tokyo ada pertandingan sepak bola.</a:t>
+              <a:t>Di Jakarta ada pertandingan sepak bola.</a:t>
             </a:r>
             <a:endParaRPr lang="en-US" sz="950" dirty="0"/>
           </a:p>
